--- a/.lessons/22 Fundamental MIddleware/5 Route Middleware/1.pptx
+++ b/.lessons/22 Fundamental MIddleware/5 Route Middleware/1.pptx
@@ -6,8 +6,11 @@
   </p:sldMasterIdLst>
   <p:sldIdLst>
     <p:sldId id="402" r:id="rId2"/>
-    <p:sldId id="403" r:id="rId3"/>
-    <p:sldId id="400" r:id="rId4"/>
+    <p:sldId id="406" r:id="rId3"/>
+    <p:sldId id="403" r:id="rId4"/>
+    <p:sldId id="404" r:id="rId5"/>
+    <p:sldId id="405" r:id="rId6"/>
+    <p:sldId id="400" r:id="rId7"/>
   </p:sldIdLst>
   <p:sldSz cx="12192000" cy="6858000"/>
   <p:notesSz cx="6858000" cy="9144000"/>
@@ -261,7 +264,7 @@
           <a:p>
             <a:fld id="{3E102D2E-813C-461C-9963-687A650C48C0}" type="datetimeFigureOut">
               <a:rPr lang="en-US" smtClean="0"/>
-              <a:t>5/23/2025</a:t>
+              <a:t>5/24/2025</a:t>
             </a:fld>
             <a:endParaRPr lang="en-US"/>
           </a:p>
@@ -459,7 +462,7 @@
           <a:p>
             <a:fld id="{3E102D2E-813C-461C-9963-687A650C48C0}" type="datetimeFigureOut">
               <a:rPr lang="en-US" smtClean="0"/>
-              <a:t>5/23/2025</a:t>
+              <a:t>5/24/2025</a:t>
             </a:fld>
             <a:endParaRPr lang="en-US"/>
           </a:p>
@@ -667,7 +670,7 @@
           <a:p>
             <a:fld id="{3E102D2E-813C-461C-9963-687A650C48C0}" type="datetimeFigureOut">
               <a:rPr lang="en-US" smtClean="0"/>
-              <a:t>5/23/2025</a:t>
+              <a:t>5/24/2025</a:t>
             </a:fld>
             <a:endParaRPr lang="en-US"/>
           </a:p>
@@ -865,7 +868,7 @@
           <a:p>
             <a:fld id="{3E102D2E-813C-461C-9963-687A650C48C0}" type="datetimeFigureOut">
               <a:rPr lang="en-US" smtClean="0"/>
-              <a:t>5/23/2025</a:t>
+              <a:t>5/24/2025</a:t>
             </a:fld>
             <a:endParaRPr lang="en-US"/>
           </a:p>
@@ -1140,7 +1143,7 @@
           <a:p>
             <a:fld id="{3E102D2E-813C-461C-9963-687A650C48C0}" type="datetimeFigureOut">
               <a:rPr lang="en-US" smtClean="0"/>
-              <a:t>5/23/2025</a:t>
+              <a:t>5/24/2025</a:t>
             </a:fld>
             <a:endParaRPr lang="en-US"/>
           </a:p>
@@ -1405,7 +1408,7 @@
           <a:p>
             <a:fld id="{3E102D2E-813C-461C-9963-687A650C48C0}" type="datetimeFigureOut">
               <a:rPr lang="en-US" smtClean="0"/>
-              <a:t>5/23/2025</a:t>
+              <a:t>5/24/2025</a:t>
             </a:fld>
             <a:endParaRPr lang="en-US"/>
           </a:p>
@@ -1817,7 +1820,7 @@
           <a:p>
             <a:fld id="{3E102D2E-813C-461C-9963-687A650C48C0}" type="datetimeFigureOut">
               <a:rPr lang="en-US" smtClean="0"/>
-              <a:t>5/23/2025</a:t>
+              <a:t>5/24/2025</a:t>
             </a:fld>
             <a:endParaRPr lang="en-US"/>
           </a:p>
@@ -1958,7 +1961,7 @@
           <a:p>
             <a:fld id="{3E102D2E-813C-461C-9963-687A650C48C0}" type="datetimeFigureOut">
               <a:rPr lang="en-US" smtClean="0"/>
-              <a:t>5/23/2025</a:t>
+              <a:t>5/24/2025</a:t>
             </a:fld>
             <a:endParaRPr lang="en-US"/>
           </a:p>
@@ -2071,7 +2074,7 @@
           <a:p>
             <a:fld id="{3E102D2E-813C-461C-9963-687A650C48C0}" type="datetimeFigureOut">
               <a:rPr lang="en-US" smtClean="0"/>
-              <a:t>5/23/2025</a:t>
+              <a:t>5/24/2025</a:t>
             </a:fld>
             <a:endParaRPr lang="en-US"/>
           </a:p>
@@ -2382,7 +2385,7 @@
           <a:p>
             <a:fld id="{3E102D2E-813C-461C-9963-687A650C48C0}" type="datetimeFigureOut">
               <a:rPr lang="en-US" smtClean="0"/>
-              <a:t>5/23/2025</a:t>
+              <a:t>5/24/2025</a:t>
             </a:fld>
             <a:endParaRPr lang="en-US"/>
           </a:p>
@@ -2670,7 +2673,7 @@
           <a:p>
             <a:fld id="{3E102D2E-813C-461C-9963-687A650C48C0}" type="datetimeFigureOut">
               <a:rPr lang="en-US" smtClean="0"/>
-              <a:t>5/23/2025</a:t>
+              <a:t>5/24/2025</a:t>
             </a:fld>
             <a:endParaRPr lang="en-US"/>
           </a:p>
@@ -2911,7 +2914,7 @@
           <a:p>
             <a:fld id="{3E102D2E-813C-461C-9963-687A650C48C0}" type="datetimeFigureOut">
               <a:rPr lang="en-US" smtClean="0"/>
-              <a:t>5/23/2025</a:t>
+              <a:t>5/24/2025</a:t>
             </a:fld>
             <a:endParaRPr lang="en-US"/>
           </a:p>
@@ -3348,8 +3351,8 @@
         </p:nvSpPr>
         <p:spPr>
           <a:xfrm>
-            <a:off x="217714" y="255046"/>
-            <a:ext cx="11756571" cy="355354"/>
+            <a:off x="217715" y="255046"/>
+            <a:ext cx="5061296" cy="3356175"/>
           </a:xfrm>
           <a:prstGeom prst="rect">
             <a:avLst/>
@@ -3369,6 +3372,207 @@
               <a:buNone/>
             </a:pPr>
             <a:r>
+              <a:rPr lang="az-Latn-AZ" altLang="en-US" sz="1300">
+                <a:latin typeface="Arial" panose="020B0604020202020204" pitchFamily="34" charset="0"/>
+              </a:rPr>
+              <a:t>İndi </a:t>
+            </a:r>
+            <a:r>
+              <a:rPr lang="az-Latn-AZ" altLang="en-US" sz="1300" b="1">
+                <a:latin typeface="Arial" panose="020B0604020202020204" pitchFamily="34" charset="0"/>
+              </a:rPr>
+              <a:t>`</a:t>
+            </a:r>
+            <a:r>
+              <a:rPr lang="az-Latn-AZ" altLang="en-US" sz="1300" b="1">
+                <a:solidFill>
+                  <a:srgbClr val="00B050"/>
+                </a:solidFill>
+                <a:latin typeface="Arial" panose="020B0604020202020204" pitchFamily="34" charset="0"/>
+              </a:rPr>
+              <a:t>$middlewareGroups</a:t>
+            </a:r>
+            <a:r>
+              <a:rPr lang="az-Latn-AZ" altLang="en-US" sz="1300">
+                <a:latin typeface="Arial" panose="020B0604020202020204" pitchFamily="34" charset="0"/>
+              </a:rPr>
+              <a:t>` massivindəki `</a:t>
+            </a:r>
+            <a:r>
+              <a:rPr lang="az-Latn-AZ" altLang="en-US" sz="1300" b="1">
+                <a:latin typeface="Arial" panose="020B0604020202020204" pitchFamily="34" charset="0"/>
+              </a:rPr>
+              <a:t>authCheck</a:t>
+            </a:r>
+            <a:r>
+              <a:rPr lang="az-Latn-AZ" altLang="en-US" sz="1300">
+                <a:latin typeface="Arial" panose="020B0604020202020204" pitchFamily="34" charset="0"/>
+              </a:rPr>
+              <a:t>` -i kommentə alırıq və </a:t>
+            </a:r>
+            <a:r>
+              <a:rPr lang="az-Latn-AZ" altLang="en-US" sz="1300" b="1">
+                <a:latin typeface="Arial" panose="020B0604020202020204" pitchFamily="34" charset="0"/>
+              </a:rPr>
+              <a:t>authCheck2</a:t>
+            </a:r>
+            <a:r>
+              <a:rPr lang="az-Latn-AZ" altLang="en-US" sz="1300">
+                <a:latin typeface="Arial" panose="020B0604020202020204" pitchFamily="34" charset="0"/>
+              </a:rPr>
+              <a:t> adı ilə əlavə edirik </a:t>
+            </a:r>
+            <a:r>
+              <a:rPr lang="az-Latn-AZ" altLang="en-US" sz="1300" b="1">
+                <a:latin typeface="Arial" panose="020B0604020202020204" pitchFamily="34" charset="0"/>
+              </a:rPr>
+              <a:t>`</a:t>
+            </a:r>
+            <a:r>
+              <a:rPr lang="az-Latn-AZ" altLang="en-US" sz="1300" b="1">
+                <a:solidFill>
+                  <a:srgbClr val="0070C0"/>
+                </a:solidFill>
+                <a:latin typeface="Arial" panose="020B0604020202020204" pitchFamily="34" charset="0"/>
+              </a:rPr>
+              <a:t>$middlewareAliases</a:t>
+            </a:r>
+            <a:r>
+              <a:rPr lang="az-Latn-AZ" altLang="en-US" sz="1300">
+                <a:latin typeface="Arial" panose="020B0604020202020204" pitchFamily="34" charset="0"/>
+              </a:rPr>
+              <a:t>` massivinə.</a:t>
+            </a:r>
+          </a:p>
+          <a:p>
+            <a:pPr>
+              <a:lnSpc>
+                <a:spcPct val="150000"/>
+              </a:lnSpc>
+              <a:buNone/>
+            </a:pPr>
+            <a:endParaRPr kumimoji="0" lang="az-Latn-AZ" altLang="en-US" sz="1300" b="0" i="0" u="none" strike="noStrike" cap="none" normalizeH="0" baseline="0">
+              <a:ln>
+                <a:noFill/>
+              </a:ln>
+              <a:solidFill>
+                <a:schemeClr val="tx1"/>
+              </a:solidFill>
+              <a:effectLst/>
+              <a:latin typeface="Arial" panose="020B0604020202020204" pitchFamily="34" charset="0"/>
+            </a:endParaRPr>
+          </a:p>
+          <a:p>
+            <a:pPr>
+              <a:lnSpc>
+                <a:spcPct val="150000"/>
+              </a:lnSpc>
+              <a:buNone/>
+            </a:pPr>
+            <a:endParaRPr lang="az-Latn-AZ" altLang="en-US" sz="1300">
+              <a:latin typeface="Arial" panose="020B0604020202020204" pitchFamily="34" charset="0"/>
+            </a:endParaRPr>
+          </a:p>
+          <a:p>
+            <a:pPr>
+              <a:lnSpc>
+                <a:spcPct val="150000"/>
+              </a:lnSpc>
+              <a:buNone/>
+            </a:pPr>
+            <a:r>
+              <a:rPr kumimoji="0" lang="az-Latn-AZ" altLang="en-US" sz="1300" b="0" i="0" u="none" strike="noStrike" cap="none" normalizeH="0" baseline="0">
+                <a:ln>
+                  <a:noFill/>
+                </a:ln>
+                <a:solidFill>
+                  <a:schemeClr val="tx1"/>
+                </a:solidFill>
+                <a:effectLst/>
+                <a:latin typeface="Arial" panose="020B0604020202020204" pitchFamily="34" charset="0"/>
+              </a:rPr>
+              <a:t>Bu massivə əlavə edilən </a:t>
+            </a:r>
+            <a:r>
+              <a:rPr lang="en-US" altLang="en-US" sz="1300" b="1">
+                <a:latin typeface="Arial" panose="020B0604020202020204" pitchFamily="34" charset="0"/>
+              </a:rPr>
+              <a:t>middleware</a:t>
+            </a:r>
+            <a:r>
+              <a:rPr lang="en-US" altLang="en-US" sz="1300">
+                <a:latin typeface="Arial" panose="020B0604020202020204" pitchFamily="34" charset="0"/>
+              </a:rPr>
+              <a:t> -</a:t>
+            </a:r>
+            <a:r>
+              <a:rPr lang="az-Latn-AZ" altLang="en-US" sz="1300">
+                <a:latin typeface="Arial" panose="020B0604020202020204" pitchFamily="34" charset="0"/>
+              </a:rPr>
+              <a:t>lər həm </a:t>
+            </a:r>
+            <a:r>
+              <a:rPr lang="az-Latn-AZ" altLang="en-US" sz="1300" b="1" i="1">
+                <a:latin typeface="Arial" panose="020B0604020202020204" pitchFamily="34" charset="0"/>
+              </a:rPr>
+              <a:t>group</a:t>
+            </a:r>
+            <a:r>
+              <a:rPr lang="az-Latn-AZ" altLang="en-US" sz="1300">
+                <a:latin typeface="Arial" panose="020B0604020202020204" pitchFamily="34" charset="0"/>
+              </a:rPr>
+              <a:t> halında həmdə </a:t>
+            </a:r>
+            <a:r>
+              <a:rPr lang="az-Latn-AZ" altLang="en-US" sz="1300" b="1" i="1">
+                <a:latin typeface="Arial" panose="020B0604020202020204" pitchFamily="34" charset="0"/>
+              </a:rPr>
+              <a:t>individual</a:t>
+            </a:r>
+            <a:r>
+              <a:rPr lang="az-Latn-AZ" altLang="en-US" sz="1300">
+                <a:latin typeface="Arial" panose="020B0604020202020204" pitchFamily="34" charset="0"/>
+              </a:rPr>
+              <a:t> olaraq istifadə edilə bilər. </a:t>
+            </a:r>
+          </a:p>
+          <a:p>
+            <a:pPr>
+              <a:lnSpc>
+                <a:spcPct val="150000"/>
+              </a:lnSpc>
+              <a:buNone/>
+            </a:pPr>
+            <a:endParaRPr kumimoji="0" lang="az-Latn-AZ" altLang="en-US" sz="1300" b="0" i="0" u="none" strike="noStrike" cap="none" normalizeH="0" baseline="0">
+              <a:ln>
+                <a:noFill/>
+              </a:ln>
+              <a:solidFill>
+                <a:schemeClr val="tx1"/>
+              </a:solidFill>
+              <a:effectLst/>
+              <a:latin typeface="Arial" panose="020B0604020202020204" pitchFamily="34" charset="0"/>
+            </a:endParaRPr>
+          </a:p>
+          <a:p>
+            <a:pPr>
+              <a:lnSpc>
+                <a:spcPct val="150000"/>
+              </a:lnSpc>
+              <a:buNone/>
+            </a:pPr>
+            <a:endParaRPr lang="az-Latn-AZ" altLang="en-US" sz="1300">
+              <a:latin typeface="Arial" panose="020B0604020202020204" pitchFamily="34" charset="0"/>
+            </a:endParaRPr>
+          </a:p>
+          <a:p>
+            <a:pPr>
+              <a:lnSpc>
+                <a:spcPct val="150000"/>
+              </a:lnSpc>
+              <a:buNone/>
+            </a:pPr>
+            <a:r>
               <a:rPr kumimoji="0" lang="en-US" altLang="en-US" sz="1300" b="0" i="0" u="none" strike="noStrike" cap="none" normalizeH="0" baseline="0">
                 <a:ln>
                   <a:noFill/>
@@ -3379,11 +3583,90 @@
                 <a:effectLst/>
                 <a:latin typeface="Arial" panose="020B0604020202020204" pitchFamily="34" charset="0"/>
               </a:rPr>
-              <a:t>.</a:t>
-            </a:r>
-          </a:p>
-        </p:txBody>
-      </p:sp>
+              <a:t>Bu </a:t>
+            </a:r>
+            <a:r>
+              <a:rPr kumimoji="0" lang="az-Latn-AZ" altLang="en-US" sz="1300" b="0" i="0" u="none" strike="noStrike" cap="none" normalizeH="0" baseline="0">
+                <a:ln>
+                  <a:noFill/>
+                </a:ln>
+                <a:solidFill>
+                  <a:schemeClr val="tx1"/>
+                </a:solidFill>
+                <a:effectLst/>
+                <a:latin typeface="Arial" panose="020B0604020202020204" pitchFamily="34" charset="0"/>
+              </a:rPr>
+              <a:t>isə</a:t>
+            </a:r>
+            <a:r>
+              <a:rPr kumimoji="0" lang="en-US" altLang="en-US" sz="1300" b="0" i="0" u="none" strike="noStrike" cap="none" normalizeH="0" baseline="0">
+                <a:ln>
+                  <a:noFill/>
+                </a:ln>
+                <a:solidFill>
+                  <a:schemeClr val="tx1"/>
+                </a:solidFill>
+                <a:effectLst/>
+                <a:latin typeface="Arial" panose="020B0604020202020204" pitchFamily="34" charset="0"/>
+              </a:rPr>
+              <a:t> Laravel-də middleware alias (ləqəb) istifadə</a:t>
+            </a:r>
+            <a:r>
+              <a:rPr kumimoji="0" lang="az-Latn-AZ" altLang="en-US" sz="1300" b="0" i="0" u="none" strike="noStrike" cap="none" normalizeH="0" baseline="0">
+                <a:ln>
+                  <a:noFill/>
+                </a:ln>
+                <a:solidFill>
+                  <a:schemeClr val="tx1"/>
+                </a:solidFill>
+                <a:effectLst/>
+                <a:latin typeface="Arial" panose="020B0604020202020204" pitchFamily="34" charset="0"/>
+              </a:rPr>
+              <a:t> edərək icazələri kontrol etməyə kömək edir.</a:t>
+            </a:r>
+            <a:endParaRPr kumimoji="0" lang="en-US" altLang="en-US" sz="1300" b="0" i="0" u="none" strike="noStrike" cap="none" normalizeH="0" baseline="0">
+              <a:ln>
+                <a:noFill/>
+              </a:ln>
+              <a:solidFill>
+                <a:schemeClr val="tx1"/>
+              </a:solidFill>
+              <a:effectLst/>
+              <a:latin typeface="Arial" panose="020B0604020202020204" pitchFamily="34" charset="0"/>
+            </a:endParaRPr>
+          </a:p>
+        </p:txBody>
+      </p:sp>
+      <p:pic>
+        <p:nvPicPr>
+          <p:cNvPr id="6" name="Picture 5">
+            <a:extLst>
+              <a:ext uri="{FF2B5EF4-FFF2-40B4-BE49-F238E27FC236}">
+                <a16:creationId xmlns:a16="http://schemas.microsoft.com/office/drawing/2014/main" id="{39EB9236-471E-BE44-6247-2C30CE3BA042}"/>
+              </a:ext>
+            </a:extLst>
+          </p:cNvPr>
+          <p:cNvPicPr>
+            <a:picLocks noChangeAspect="1"/>
+          </p:cNvPicPr>
+          <p:nvPr/>
+        </p:nvPicPr>
+        <p:blipFill>
+          <a:blip r:embed="rId2"/>
+          <a:stretch>
+            <a:fillRect/>
+          </a:stretch>
+        </p:blipFill>
+        <p:spPr>
+          <a:xfrm>
+            <a:off x="5425807" y="-11796"/>
+            <a:ext cx="6766193" cy="6858000"/>
+          </a:xfrm>
+          <a:prstGeom prst="rect">
+            <a:avLst/>
+          </a:prstGeom>
+        </p:spPr>
+      </p:pic>
     </p:spTree>
     <p:extLst>
       <p:ext uri="{BB962C8B-B14F-4D97-AF65-F5344CB8AC3E}">
@@ -3398,6 +3681,137 @@
 </file>
 
 <file path=ppt/slides/slide2.xml><?xml version="1.0" encoding="utf-8"?>
+<p:sld xmlns:a="http://schemas.openxmlformats.org/drawingml/2006/main" xmlns:r="http://schemas.openxmlformats.org/officeDocument/2006/relationships" xmlns:p="http://schemas.openxmlformats.org/presentationml/2006/main">
+  <p:cSld>
+    <p:spTree>
+      <p:nvGrpSpPr>
+        <p:cNvPr id="1" name="">
+          <a:extLst>
+            <a:ext uri="{FF2B5EF4-FFF2-40B4-BE49-F238E27FC236}">
+              <a16:creationId xmlns:a16="http://schemas.microsoft.com/office/drawing/2014/main" id="{F335F46F-8FED-AFFE-6BED-FC9B171482F5}"/>
+            </a:ext>
+          </a:extLst>
+        </p:cNvPr>
+        <p:cNvGrpSpPr/>
+        <p:nvPr/>
+      </p:nvGrpSpPr>
+      <p:grpSpPr>
+        <a:xfrm>
+          <a:off x="0" y="0"/>
+          <a:ext cx="0" cy="0"/>
+          <a:chOff x="0" y="0"/>
+          <a:chExt cx="0" cy="0"/>
+        </a:xfrm>
+      </p:grpSpPr>
+      <p:sp>
+        <p:nvSpPr>
+          <p:cNvPr id="3" name="TextBox 2">
+            <a:extLst>
+              <a:ext uri="{FF2B5EF4-FFF2-40B4-BE49-F238E27FC236}">
+                <a16:creationId xmlns:a16="http://schemas.microsoft.com/office/drawing/2014/main" id="{1C01FB3A-CACF-D1F8-C93A-3D8C6E2A5AE8}"/>
+              </a:ext>
+            </a:extLst>
+          </p:cNvPr>
+          <p:cNvSpPr txBox="1"/>
+          <p:nvPr/>
+        </p:nvSpPr>
+        <p:spPr>
+          <a:xfrm>
+            <a:off x="217714" y="255046"/>
+            <a:ext cx="11756571" cy="355354"/>
+          </a:xfrm>
+          <a:prstGeom prst="rect">
+            <a:avLst/>
+          </a:prstGeom>
+          <a:noFill/>
+        </p:spPr>
+        <p:txBody>
+          <a:bodyPr wrap="square">
+            <a:spAutoFit/>
+          </a:bodyPr>
+          <a:lstStyle/>
+          <a:p>
+            <a:pPr>
+              <a:lnSpc>
+                <a:spcPct val="150000"/>
+              </a:lnSpc>
+              <a:buNone/>
+            </a:pPr>
+            <a:r>
+              <a:rPr lang="az-Latn-AZ" altLang="en-US" sz="1300">
+                <a:latin typeface="Arial" panose="020B0604020202020204" pitchFamily="34" charset="0"/>
+              </a:rPr>
+              <a:t>Kod hissəsinə toxunmuruq olduğu kimi qalır. Keçid edirik </a:t>
+            </a:r>
+            <a:r>
+              <a:rPr lang="en-US" altLang="en-US" sz="1300" b="1">
+                <a:latin typeface="Arial" panose="020B0604020202020204" pitchFamily="34" charset="0"/>
+              </a:rPr>
+              <a:t>web.php </a:t>
+            </a:r>
+            <a:r>
+              <a:rPr lang="az-Latn-AZ" altLang="en-US" sz="1300">
+                <a:latin typeface="Arial" panose="020B0604020202020204" pitchFamily="34" charset="0"/>
+              </a:rPr>
+              <a:t>faylına.</a:t>
+            </a:r>
+            <a:endParaRPr kumimoji="0" lang="en-US" altLang="en-US" sz="1300" b="0" i="0" u="none" strike="noStrike" cap="none" normalizeH="0" baseline="0">
+              <a:ln>
+                <a:noFill/>
+              </a:ln>
+              <a:solidFill>
+                <a:schemeClr val="tx1"/>
+              </a:solidFill>
+              <a:effectLst/>
+              <a:latin typeface="Arial" panose="020B0604020202020204" pitchFamily="34" charset="0"/>
+            </a:endParaRPr>
+          </a:p>
+        </p:txBody>
+      </p:sp>
+      <p:pic>
+        <p:nvPicPr>
+          <p:cNvPr id="4" name="Picture 3">
+            <a:extLst>
+              <a:ext uri="{FF2B5EF4-FFF2-40B4-BE49-F238E27FC236}">
+                <a16:creationId xmlns:a16="http://schemas.microsoft.com/office/drawing/2014/main" id="{D4AE7619-23E9-4A60-82B2-3BB59DCDFC48}"/>
+              </a:ext>
+            </a:extLst>
+          </p:cNvPr>
+          <p:cNvPicPr>
+            <a:picLocks noChangeAspect="1"/>
+          </p:cNvPicPr>
+          <p:nvPr/>
+        </p:nvPicPr>
+        <p:blipFill>
+          <a:blip r:embed="rId2"/>
+          <a:stretch>
+            <a:fillRect/>
+          </a:stretch>
+        </p:blipFill>
+        <p:spPr>
+          <a:xfrm>
+            <a:off x="6152307" y="2523520"/>
+            <a:ext cx="6039693" cy="4334480"/>
+          </a:xfrm>
+          <a:prstGeom prst="rect">
+            <a:avLst/>
+          </a:prstGeom>
+        </p:spPr>
+      </p:pic>
+    </p:spTree>
+    <p:extLst>
+      <p:ext uri="{BB962C8B-B14F-4D97-AF65-F5344CB8AC3E}">
+        <p14:creationId xmlns:p14="http://schemas.microsoft.com/office/powerpoint/2010/main" val="3504859962"/>
+      </p:ext>
+    </p:extLst>
+  </p:cSld>
+  <p:clrMapOvr>
+    <a:masterClrMapping/>
+  </p:clrMapOvr>
+</p:sld>
+</file>
+
+<file path=ppt/slides/slide3.xml><?xml version="1.0" encoding="utf-8"?>
 <p:sld xmlns:a="http://schemas.openxmlformats.org/drawingml/2006/main" xmlns:r="http://schemas.openxmlformats.org/officeDocument/2006/relationships" xmlns:p="http://schemas.openxmlformats.org/presentationml/2006/main">
   <p:cSld>
     <p:spTree>
@@ -3435,7 +3849,7 @@
         <p:spPr>
           <a:xfrm>
             <a:off x="217714" y="255046"/>
-            <a:ext cx="11756571" cy="355354"/>
+            <a:ext cx="11756571" cy="4256422"/>
           </a:xfrm>
           <a:prstGeom prst="rect">
             <a:avLst/>
@@ -3465,11 +3879,567 @@
                 <a:effectLst/>
                 <a:latin typeface="Arial" panose="020B0604020202020204" pitchFamily="34" charset="0"/>
               </a:rPr>
-              <a:t>.</a:t>
-            </a:r>
-          </a:p>
-        </p:txBody>
-      </p:sp>
+              <a:t>Route-da istifadə:</a:t>
+            </a:r>
+            <a:endParaRPr kumimoji="0" lang="az-Latn-AZ" altLang="en-US" sz="1300" b="0" i="0" u="none" strike="noStrike" cap="none" normalizeH="0" baseline="0">
+              <a:ln>
+                <a:noFill/>
+              </a:ln>
+              <a:solidFill>
+                <a:schemeClr val="tx1"/>
+              </a:solidFill>
+              <a:effectLst/>
+              <a:latin typeface="Arial" panose="020B0604020202020204" pitchFamily="34" charset="0"/>
+            </a:endParaRPr>
+          </a:p>
+          <a:p>
+            <a:pPr>
+              <a:lnSpc>
+                <a:spcPct val="150000"/>
+              </a:lnSpc>
+              <a:buNone/>
+            </a:pPr>
+            <a:endParaRPr lang="az-Latn-AZ" altLang="en-US" sz="1300">
+              <a:latin typeface="Arial" panose="020B0604020202020204" pitchFamily="34" charset="0"/>
+            </a:endParaRPr>
+          </a:p>
+          <a:p>
+            <a:pPr>
+              <a:lnSpc>
+                <a:spcPct val="150000"/>
+              </a:lnSpc>
+              <a:buNone/>
+            </a:pPr>
+            <a:endParaRPr kumimoji="0" lang="az-Latn-AZ" altLang="en-US" sz="1300" b="0" i="0" u="none" strike="noStrike" cap="none" normalizeH="0" baseline="0">
+              <a:ln>
+                <a:noFill/>
+              </a:ln>
+              <a:solidFill>
+                <a:schemeClr val="tx1"/>
+              </a:solidFill>
+              <a:effectLst/>
+              <a:latin typeface="Arial" panose="020B0604020202020204" pitchFamily="34" charset="0"/>
+            </a:endParaRPr>
+          </a:p>
+          <a:p>
+            <a:pPr>
+              <a:lnSpc>
+                <a:spcPct val="150000"/>
+              </a:lnSpc>
+              <a:buNone/>
+            </a:pPr>
+            <a:endParaRPr lang="az-Latn-AZ" altLang="en-US" sz="1300">
+              <a:latin typeface="Arial" panose="020B0604020202020204" pitchFamily="34" charset="0"/>
+            </a:endParaRPr>
+          </a:p>
+          <a:p>
+            <a:pPr>
+              <a:lnSpc>
+                <a:spcPct val="150000"/>
+              </a:lnSpc>
+              <a:buNone/>
+            </a:pPr>
+            <a:endParaRPr kumimoji="0" lang="az-Latn-AZ" altLang="en-US" sz="1300" b="0" i="0" u="none" strike="noStrike" cap="none" normalizeH="0" baseline="0">
+              <a:ln>
+                <a:noFill/>
+              </a:ln>
+              <a:solidFill>
+                <a:schemeClr val="tx1"/>
+              </a:solidFill>
+              <a:effectLst/>
+              <a:latin typeface="Arial" panose="020B0604020202020204" pitchFamily="34" charset="0"/>
+            </a:endParaRPr>
+          </a:p>
+          <a:p>
+            <a:pPr>
+              <a:lnSpc>
+                <a:spcPct val="150000"/>
+              </a:lnSpc>
+              <a:buNone/>
+            </a:pPr>
+            <a:r>
+              <a:rPr kumimoji="0" lang="az-Latn-AZ" altLang="en-US" sz="1300" b="0" i="0" u="none" strike="noStrike" cap="none" normalizeH="0" baseline="0">
+                <a:ln>
+                  <a:noFill/>
+                </a:ln>
+                <a:solidFill>
+                  <a:schemeClr val="tx1"/>
+                </a:solidFill>
+                <a:effectLst/>
+                <a:latin typeface="Arial" panose="020B0604020202020204" pitchFamily="34" charset="0"/>
+              </a:rPr>
+              <a:t>Bu yazı nə edir? </a:t>
+            </a:r>
+          </a:p>
+          <a:p>
+            <a:pPr>
+              <a:lnSpc>
+                <a:spcPct val="150000"/>
+              </a:lnSpc>
+              <a:buNone/>
+            </a:pPr>
+            <a:endParaRPr lang="az-Latn-AZ" altLang="en-US" sz="1300">
+              <a:latin typeface="Arial" panose="020B0604020202020204" pitchFamily="34" charset="0"/>
+            </a:endParaRPr>
+          </a:p>
+          <a:p>
+            <a:pPr>
+              <a:lnSpc>
+                <a:spcPct val="150000"/>
+              </a:lnSpc>
+              <a:buNone/>
+            </a:pPr>
+            <a:r>
+              <a:rPr kumimoji="0" lang="az-Latn-AZ" altLang="en-US" sz="1300" b="1" i="0" u="none" strike="noStrike" cap="none" normalizeH="0" baseline="0">
+                <a:ln>
+                  <a:noFill/>
+                </a:ln>
+                <a:solidFill>
+                  <a:schemeClr val="tx1"/>
+                </a:solidFill>
+                <a:effectLst/>
+                <a:latin typeface="Arial" panose="020B0604020202020204" pitchFamily="34" charset="0"/>
+              </a:rPr>
+              <a:t>posts</a:t>
+            </a:r>
+            <a:r>
+              <a:rPr kumimoji="0" lang="az-Latn-AZ" altLang="en-US" sz="1300" b="0" i="0" u="none" strike="noStrike" cap="none" normalizeH="0" baseline="0">
+                <a:ln>
+                  <a:noFill/>
+                </a:ln>
+                <a:solidFill>
+                  <a:schemeClr val="tx1"/>
+                </a:solidFill>
+                <a:effectLst/>
+                <a:latin typeface="Arial" panose="020B0604020202020204" pitchFamily="34" charset="0"/>
+              </a:rPr>
+              <a:t> resursuna aid bütün </a:t>
+            </a:r>
+            <a:r>
+              <a:rPr kumimoji="0" lang="az-Latn-AZ" altLang="en-US" sz="1300" b="1" i="0" u="none" strike="noStrike" cap="none" normalizeH="0" baseline="0">
+                <a:ln>
+                  <a:noFill/>
+                </a:ln>
+                <a:solidFill>
+                  <a:schemeClr val="tx1"/>
+                </a:solidFill>
+                <a:effectLst/>
+                <a:latin typeface="Arial" panose="020B0604020202020204" pitchFamily="34" charset="0"/>
+              </a:rPr>
+              <a:t>route</a:t>
+            </a:r>
+            <a:r>
+              <a:rPr kumimoji="0" lang="az-Latn-AZ" altLang="en-US" sz="1300" b="0" i="0" u="none" strike="noStrike" cap="none" normalizeH="0" baseline="0">
+                <a:ln>
+                  <a:noFill/>
+                </a:ln>
+                <a:solidFill>
+                  <a:schemeClr val="tx1"/>
+                </a:solidFill>
+                <a:effectLst/>
+                <a:latin typeface="Arial" panose="020B0604020202020204" pitchFamily="34" charset="0"/>
+              </a:rPr>
+              <a:t>-lar (index, create, store, edit, update, destroy, show) </a:t>
+            </a:r>
+            <a:r>
+              <a:rPr kumimoji="0" lang="az-Latn-AZ" altLang="en-US" sz="1300" b="1" i="0" u="none" strike="noStrike" cap="none" normalizeH="0" baseline="0">
+                <a:ln>
+                  <a:noFill/>
+                </a:ln>
+                <a:solidFill>
+                  <a:srgbClr val="FF0000"/>
+                </a:solidFill>
+                <a:effectLst/>
+                <a:latin typeface="Arial" panose="020B0604020202020204" pitchFamily="34" charset="0"/>
+              </a:rPr>
+              <a:t>authCheck2</a:t>
+            </a:r>
+            <a:r>
+              <a:rPr kumimoji="0" lang="az-Latn-AZ" altLang="en-US" sz="1300" b="0" i="0" u="none" strike="noStrike" cap="none" normalizeH="0" baseline="0">
+                <a:ln>
+                  <a:noFill/>
+                </a:ln>
+                <a:solidFill>
+                  <a:schemeClr val="tx1"/>
+                </a:solidFill>
+                <a:effectLst/>
+                <a:latin typeface="Arial" panose="020B0604020202020204" pitchFamily="34" charset="0"/>
+              </a:rPr>
+              <a:t> middleware-i ilə qorunur. Yəni </a:t>
+            </a:r>
+            <a:r>
+              <a:rPr kumimoji="0" lang="az-Latn-AZ" altLang="en-US" sz="1300" b="1" i="0" u="none" strike="noStrike" cap="none" normalizeH="0" baseline="0">
+                <a:ln>
+                  <a:noFill/>
+                </a:ln>
+                <a:solidFill>
+                  <a:srgbClr val="FF0000"/>
+                </a:solidFill>
+                <a:effectLst/>
+                <a:latin typeface="Arial" panose="020B0604020202020204" pitchFamily="34" charset="0"/>
+              </a:rPr>
+              <a:t>AuthCheck</a:t>
+            </a:r>
+            <a:r>
+              <a:rPr kumimoji="0" lang="az-Latn-AZ" altLang="en-US" sz="1300" b="0" i="0" u="none" strike="noStrike" cap="none" normalizeH="0" baseline="0">
+                <a:ln>
+                  <a:noFill/>
+                </a:ln>
+                <a:solidFill>
+                  <a:schemeClr val="tx1"/>
+                </a:solidFill>
+                <a:effectLst/>
+                <a:latin typeface="Arial" panose="020B0604020202020204" pitchFamily="34" charset="0"/>
+              </a:rPr>
+              <a:t> </a:t>
+            </a:r>
+            <a:r>
+              <a:rPr kumimoji="0" lang="az-Latn-AZ" altLang="en-US" sz="1300" b="1" i="0" u="none" strike="noStrike" cap="none" normalizeH="0" baseline="0">
+                <a:ln>
+                  <a:noFill/>
+                </a:ln>
+                <a:solidFill>
+                  <a:schemeClr val="tx1"/>
+                </a:solidFill>
+                <a:effectLst/>
+                <a:latin typeface="Arial" panose="020B0604020202020204" pitchFamily="34" charset="0"/>
+              </a:rPr>
+              <a:t>middleware</a:t>
+            </a:r>
+            <a:r>
+              <a:rPr kumimoji="0" lang="az-Latn-AZ" altLang="en-US" sz="1300" b="0" i="0" u="none" strike="noStrike" cap="none" normalizeH="0" baseline="0">
+                <a:ln>
+                  <a:noFill/>
+                </a:ln>
+                <a:solidFill>
+                  <a:schemeClr val="tx1"/>
+                </a:solidFill>
+                <a:effectLst/>
+                <a:latin typeface="Arial" panose="020B0604020202020204" pitchFamily="34" charset="0"/>
+              </a:rPr>
+              <a:t> hər bir </a:t>
+            </a:r>
+            <a:r>
+              <a:rPr kumimoji="0" lang="az-Latn-AZ" altLang="en-US" sz="1300" b="1" i="0" u="none" strike="noStrike" cap="none" normalizeH="0" baseline="0">
+                <a:ln>
+                  <a:noFill/>
+                </a:ln>
+                <a:solidFill>
+                  <a:schemeClr val="tx1"/>
+                </a:solidFill>
+                <a:effectLst/>
+                <a:latin typeface="Arial" panose="020B0604020202020204" pitchFamily="34" charset="0"/>
+              </a:rPr>
+              <a:t>HTTP</a:t>
+            </a:r>
+            <a:r>
+              <a:rPr kumimoji="0" lang="az-Latn-AZ" altLang="en-US" sz="1300" b="0" i="0" u="none" strike="noStrike" cap="none" normalizeH="0" baseline="0">
+                <a:ln>
+                  <a:noFill/>
+                </a:ln>
+                <a:solidFill>
+                  <a:schemeClr val="tx1"/>
+                </a:solidFill>
+                <a:effectLst/>
+                <a:latin typeface="Arial" panose="020B0604020202020204" pitchFamily="34" charset="0"/>
+              </a:rPr>
+              <a:t> sorğunu yoxlayacaq və yalnız </a:t>
+            </a:r>
+            <a:r>
+              <a:rPr kumimoji="0" lang="az-Latn-AZ" altLang="en-US" sz="1300" b="1" i="0" u="none" strike="noStrike" cap="none" normalizeH="0" baseline="0">
+                <a:ln>
+                  <a:noFill/>
+                </a:ln>
+                <a:solidFill>
+                  <a:srgbClr val="00B050"/>
+                </a:solidFill>
+                <a:effectLst/>
+                <a:latin typeface="Arial" panose="020B0604020202020204" pitchFamily="34" charset="0"/>
+              </a:rPr>
+              <a:t>auth=1</a:t>
+            </a:r>
+            <a:r>
+              <a:rPr kumimoji="0" lang="az-Latn-AZ" altLang="en-US" sz="1300" b="0" i="0" u="none" strike="noStrike" cap="none" normalizeH="0" baseline="0">
+                <a:ln>
+                  <a:noFill/>
+                </a:ln>
+                <a:solidFill>
+                  <a:schemeClr val="tx1"/>
+                </a:solidFill>
+                <a:effectLst/>
+                <a:latin typeface="Arial" panose="020B0604020202020204" pitchFamily="34" charset="0"/>
+              </a:rPr>
+              <a:t> query varsa, keçməyə icazə verəcək.</a:t>
+            </a:r>
+          </a:p>
+          <a:p>
+            <a:pPr>
+              <a:lnSpc>
+                <a:spcPct val="150000"/>
+              </a:lnSpc>
+              <a:buNone/>
+            </a:pPr>
+            <a:endParaRPr lang="az-Latn-AZ" altLang="en-US" sz="1300">
+              <a:latin typeface="Arial" panose="020B0604020202020204" pitchFamily="34" charset="0"/>
+            </a:endParaRPr>
+          </a:p>
+          <a:p>
+            <a:pPr>
+              <a:lnSpc>
+                <a:spcPct val="150000"/>
+              </a:lnSpc>
+              <a:buNone/>
+            </a:pPr>
+            <a:endParaRPr kumimoji="0" lang="az-Latn-AZ" altLang="en-US" sz="1300" b="0" i="0" u="none" strike="noStrike" cap="none" normalizeH="0" baseline="0">
+              <a:ln>
+                <a:noFill/>
+              </a:ln>
+              <a:solidFill>
+                <a:schemeClr val="tx1"/>
+              </a:solidFill>
+              <a:effectLst/>
+              <a:latin typeface="Arial" panose="020B0604020202020204" pitchFamily="34" charset="0"/>
+            </a:endParaRPr>
+          </a:p>
+          <a:p>
+            <a:pPr>
+              <a:lnSpc>
+                <a:spcPct val="150000"/>
+              </a:lnSpc>
+              <a:buNone/>
+            </a:pPr>
+            <a:endParaRPr lang="az-Latn-AZ" altLang="en-US" sz="1300">
+              <a:latin typeface="Arial" panose="020B0604020202020204" pitchFamily="34" charset="0"/>
+            </a:endParaRPr>
+          </a:p>
+          <a:p>
+            <a:pPr>
+              <a:lnSpc>
+                <a:spcPct val="150000"/>
+              </a:lnSpc>
+              <a:buNone/>
+            </a:pPr>
+            <a:endParaRPr kumimoji="0" lang="az-Latn-AZ" altLang="en-US" sz="1300" b="0" i="0" u="none" strike="noStrike" cap="none" normalizeH="0" baseline="0">
+              <a:ln>
+                <a:noFill/>
+              </a:ln>
+              <a:solidFill>
+                <a:schemeClr val="tx1"/>
+              </a:solidFill>
+              <a:effectLst/>
+              <a:latin typeface="Arial" panose="020B0604020202020204" pitchFamily="34" charset="0"/>
+            </a:endParaRPr>
+          </a:p>
+          <a:p>
+            <a:pPr>
+              <a:lnSpc>
+                <a:spcPct val="150000"/>
+              </a:lnSpc>
+              <a:buNone/>
+            </a:pPr>
+            <a:r>
+              <a:rPr kumimoji="0" lang="en-US" altLang="en-US" sz="1300" b="0" i="0" u="none" strike="noStrike" cap="none" normalizeH="0" baseline="0">
+                <a:ln>
+                  <a:noFill/>
+                </a:ln>
+                <a:solidFill>
+                  <a:schemeClr val="tx1"/>
+                </a:solidFill>
+                <a:effectLst/>
+                <a:latin typeface="Arial" panose="020B0604020202020204" pitchFamily="34" charset="0"/>
+              </a:rPr>
+              <a:t>Əgər </a:t>
+            </a:r>
+            <a:r>
+              <a:rPr kumimoji="0" lang="az-Latn-AZ" altLang="en-US" sz="1300" b="0" i="0" u="none" strike="noStrike" cap="none" normalizeH="0" baseline="0">
+                <a:ln>
+                  <a:noFill/>
+                </a:ln>
+                <a:solidFill>
+                  <a:schemeClr val="tx1"/>
+                </a:solidFill>
+                <a:effectLst/>
+                <a:latin typeface="Arial" panose="020B0604020202020204" pitchFamily="34" charset="0"/>
+              </a:rPr>
+              <a:t>biz</a:t>
+            </a:r>
+            <a:r>
+              <a:rPr kumimoji="0" lang="en-US" altLang="en-US" sz="1300" b="0" i="0" u="none" strike="noStrike" cap="none" normalizeH="0" baseline="0">
+                <a:ln>
+                  <a:noFill/>
+                </a:ln>
+                <a:solidFill>
+                  <a:schemeClr val="tx1"/>
+                </a:solidFill>
+                <a:effectLst/>
+                <a:latin typeface="Arial" panose="020B0604020202020204" pitchFamily="34" charset="0"/>
+              </a:rPr>
+              <a:t> </a:t>
+            </a:r>
+            <a:r>
+              <a:rPr kumimoji="0" lang="en-US" altLang="en-US" sz="1300" b="1" i="0" u="none" strike="noStrike" cap="none" normalizeH="0" baseline="0">
+                <a:ln>
+                  <a:noFill/>
+                </a:ln>
+                <a:solidFill>
+                  <a:srgbClr val="FF0000"/>
+                </a:solidFill>
+                <a:effectLst/>
+                <a:latin typeface="Arial" panose="020B0604020202020204" pitchFamily="34" charset="0"/>
+              </a:rPr>
+              <a:t>authCheck2</a:t>
+            </a:r>
+            <a:r>
+              <a:rPr kumimoji="0" lang="en-US" altLang="en-US" sz="1300" b="0" i="0" u="none" strike="noStrike" cap="none" normalizeH="0" baseline="0">
+                <a:ln>
+                  <a:noFill/>
+                </a:ln>
+                <a:solidFill>
+                  <a:schemeClr val="tx1"/>
+                </a:solidFill>
+                <a:effectLst/>
+                <a:latin typeface="Arial" panose="020B0604020202020204" pitchFamily="34" charset="0"/>
+              </a:rPr>
+              <a:t> aliasını istifadə etməsəydi</a:t>
+            </a:r>
+            <a:r>
+              <a:rPr kumimoji="0" lang="az-Latn-AZ" altLang="en-US" sz="1300" b="0" i="0" u="none" strike="noStrike" cap="none" normalizeH="0" baseline="0">
+                <a:ln>
+                  <a:noFill/>
+                </a:ln>
+                <a:solidFill>
+                  <a:schemeClr val="tx1"/>
+                </a:solidFill>
+                <a:effectLst/>
+                <a:latin typeface="Arial" panose="020B0604020202020204" pitchFamily="34" charset="0"/>
+              </a:rPr>
+              <a:t>k</a:t>
+            </a:r>
+            <a:r>
+              <a:rPr kumimoji="0" lang="en-US" altLang="en-US" sz="1300" b="0" i="0" u="none" strike="noStrike" cap="none" normalizeH="0" baseline="0">
+                <a:ln>
+                  <a:noFill/>
+                </a:ln>
+                <a:solidFill>
+                  <a:schemeClr val="tx1"/>
+                </a:solidFill>
+                <a:effectLst/>
+                <a:latin typeface="Arial" panose="020B0604020202020204" pitchFamily="34" charset="0"/>
+              </a:rPr>
+              <a:t>, belə yazmalı idi</a:t>
+            </a:r>
+            <a:r>
+              <a:rPr kumimoji="0" lang="az-Latn-AZ" altLang="en-US" sz="1300" b="0" i="0" u="none" strike="noStrike" cap="none" normalizeH="0" baseline="0">
+                <a:ln>
+                  <a:noFill/>
+                </a:ln>
+                <a:solidFill>
+                  <a:schemeClr val="tx1"/>
+                </a:solidFill>
+                <a:effectLst/>
+                <a:latin typeface="Arial" panose="020B0604020202020204" pitchFamily="34" charset="0"/>
+              </a:rPr>
+              <a:t>k</a:t>
+            </a:r>
+            <a:r>
+              <a:rPr kumimoji="0" lang="en-US" altLang="en-US" sz="1300" b="0" i="0" u="none" strike="noStrike" cap="none" normalizeH="0" baseline="0">
+                <a:ln>
+                  <a:noFill/>
+                </a:ln>
+                <a:solidFill>
+                  <a:schemeClr val="tx1"/>
+                </a:solidFill>
+                <a:effectLst/>
+                <a:latin typeface="Arial" panose="020B0604020202020204" pitchFamily="34" charset="0"/>
+              </a:rPr>
+              <a:t>:</a:t>
+            </a:r>
+            <a:r>
+              <a:rPr kumimoji="0" lang="az-Latn-AZ" altLang="en-US" sz="1300" b="0" i="0" u="none" strike="noStrike" cap="none" normalizeH="0" baseline="0">
+                <a:ln>
+                  <a:noFill/>
+                </a:ln>
+                <a:solidFill>
+                  <a:schemeClr val="tx1"/>
+                </a:solidFill>
+                <a:effectLst/>
+                <a:latin typeface="Arial" panose="020B0604020202020204" pitchFamily="34" charset="0"/>
+              </a:rPr>
+              <a:t>  bu isə uzun və kodun oxunuşunu çətinləşdirir.</a:t>
+            </a:r>
+            <a:endParaRPr kumimoji="0" lang="en-US" altLang="en-US" sz="1300" b="0" i="0" u="none" strike="noStrike" cap="none" normalizeH="0" baseline="0">
+              <a:ln>
+                <a:noFill/>
+              </a:ln>
+              <a:solidFill>
+                <a:schemeClr val="tx1"/>
+              </a:solidFill>
+              <a:effectLst/>
+              <a:latin typeface="Arial" panose="020B0604020202020204" pitchFamily="34" charset="0"/>
+            </a:endParaRPr>
+          </a:p>
+        </p:txBody>
+      </p:sp>
+      <p:pic>
+        <p:nvPicPr>
+          <p:cNvPr id="4" name="Picture 3">
+            <a:extLst>
+              <a:ext uri="{FF2B5EF4-FFF2-40B4-BE49-F238E27FC236}">
+                <a16:creationId xmlns:a16="http://schemas.microsoft.com/office/drawing/2014/main" id="{11E71BA2-94D6-376A-AEED-B12EAA40F3EA}"/>
+              </a:ext>
+            </a:extLst>
+          </p:cNvPr>
+          <p:cNvPicPr>
+            <a:picLocks noChangeAspect="1"/>
+          </p:cNvPicPr>
+          <p:nvPr/>
+        </p:nvPicPr>
+        <p:blipFill>
+          <a:blip r:embed="rId2"/>
+          <a:stretch>
+            <a:fillRect/>
+          </a:stretch>
+        </p:blipFill>
+        <p:spPr>
+          <a:xfrm>
+            <a:off x="0" y="801096"/>
+            <a:ext cx="6258798" cy="485843"/>
+          </a:xfrm>
+          <a:prstGeom prst="rect">
+            <a:avLst/>
+          </a:prstGeom>
+        </p:spPr>
+      </p:pic>
+      <p:pic>
+        <p:nvPicPr>
+          <p:cNvPr id="6" name="Picture 5">
+            <a:extLst>
+              <a:ext uri="{FF2B5EF4-FFF2-40B4-BE49-F238E27FC236}">
+                <a16:creationId xmlns:a16="http://schemas.microsoft.com/office/drawing/2014/main" id="{BDC85C71-9EE4-4BC5-CC57-8D58D6683877}"/>
+              </a:ext>
+            </a:extLst>
+          </p:cNvPr>
+          <p:cNvPicPr>
+            <a:picLocks noChangeAspect="1"/>
+          </p:cNvPicPr>
+          <p:nvPr/>
+        </p:nvPicPr>
+        <p:blipFill>
+          <a:blip r:embed="rId3"/>
+          <a:stretch>
+            <a:fillRect/>
+          </a:stretch>
+        </p:blipFill>
+        <p:spPr>
+          <a:xfrm>
+            <a:off x="0" y="4681228"/>
+            <a:ext cx="4877481" cy="752580"/>
+          </a:xfrm>
+          <a:prstGeom prst="rect">
+            <a:avLst/>
+          </a:prstGeom>
+        </p:spPr>
+      </p:pic>
     </p:spTree>
     <p:extLst>
       <p:ext uri="{BB962C8B-B14F-4D97-AF65-F5344CB8AC3E}">
@@ -3483,7 +4453,443 @@
 </p:sld>
 </file>
 
-<file path=ppt/slides/slide3.xml><?xml version="1.0" encoding="utf-8"?>
+<file path=ppt/slides/slide4.xml><?xml version="1.0" encoding="utf-8"?>
+<p:sld xmlns:a="http://schemas.openxmlformats.org/drawingml/2006/main" xmlns:r="http://schemas.openxmlformats.org/officeDocument/2006/relationships" xmlns:p="http://schemas.openxmlformats.org/presentationml/2006/main">
+  <p:cSld>
+    <p:spTree>
+      <p:nvGrpSpPr>
+        <p:cNvPr id="1" name="">
+          <a:extLst>
+            <a:ext uri="{FF2B5EF4-FFF2-40B4-BE49-F238E27FC236}">
+              <a16:creationId xmlns:a16="http://schemas.microsoft.com/office/drawing/2014/main" id="{E1501751-AD28-634C-D207-3DAD243D19C6}"/>
+            </a:ext>
+          </a:extLst>
+        </p:cNvPr>
+        <p:cNvGrpSpPr/>
+        <p:nvPr/>
+      </p:nvGrpSpPr>
+      <p:grpSpPr>
+        <a:xfrm>
+          <a:off x="0" y="0"/>
+          <a:ext cx="0" cy="0"/>
+          <a:chOff x="0" y="0"/>
+          <a:chExt cx="0" cy="0"/>
+        </a:xfrm>
+      </p:grpSpPr>
+      <p:sp>
+        <p:nvSpPr>
+          <p:cNvPr id="3" name="TextBox 2">
+            <a:extLst>
+              <a:ext uri="{FF2B5EF4-FFF2-40B4-BE49-F238E27FC236}">
+                <a16:creationId xmlns:a16="http://schemas.microsoft.com/office/drawing/2014/main" id="{B0032869-09A6-DBC8-44CC-32C081238B56}"/>
+              </a:ext>
+            </a:extLst>
+          </p:cNvPr>
+          <p:cNvSpPr txBox="1"/>
+          <p:nvPr/>
+        </p:nvSpPr>
+        <p:spPr>
+          <a:xfrm>
+            <a:off x="217714" y="255046"/>
+            <a:ext cx="11756571" cy="2756011"/>
+          </a:xfrm>
+          <a:prstGeom prst="rect">
+            <a:avLst/>
+          </a:prstGeom>
+          <a:noFill/>
+        </p:spPr>
+        <p:txBody>
+          <a:bodyPr wrap="square">
+            <a:spAutoFit/>
+          </a:bodyPr>
+          <a:lstStyle/>
+          <a:p>
+            <a:pPr>
+              <a:lnSpc>
+                <a:spcPct val="150000"/>
+              </a:lnSpc>
+              <a:buNone/>
+            </a:pPr>
+            <a:r>
+              <a:rPr kumimoji="0" lang="en-US" altLang="en-US" sz="1300" b="0" i="0" u="none" strike="noStrike" cap="none" normalizeH="0" baseline="0">
+                <a:ln>
+                  <a:noFill/>
+                </a:ln>
+                <a:solidFill>
+                  <a:schemeClr val="tx1"/>
+                </a:solidFill>
+                <a:effectLst/>
+                <a:latin typeface="Arial" panose="020B0604020202020204" pitchFamily="34" charset="0"/>
+              </a:rPr>
+              <a:t>Necə işləyir?</a:t>
+            </a:r>
+            <a:endParaRPr kumimoji="0" lang="az-Latn-AZ" altLang="en-US" sz="1300" b="0" i="0" u="none" strike="noStrike" cap="none" normalizeH="0" baseline="0">
+              <a:ln>
+                <a:noFill/>
+              </a:ln>
+              <a:solidFill>
+                <a:schemeClr val="tx1"/>
+              </a:solidFill>
+              <a:effectLst/>
+              <a:latin typeface="Arial" panose="020B0604020202020204" pitchFamily="34" charset="0"/>
+            </a:endParaRPr>
+          </a:p>
+          <a:p>
+            <a:pPr>
+              <a:lnSpc>
+                <a:spcPct val="150000"/>
+              </a:lnSpc>
+              <a:buNone/>
+            </a:pPr>
+            <a:endParaRPr lang="az-Latn-AZ" altLang="en-US" sz="1300">
+              <a:latin typeface="Arial" panose="020B0604020202020204" pitchFamily="34" charset="0"/>
+            </a:endParaRPr>
+          </a:p>
+          <a:p>
+            <a:pPr>
+              <a:lnSpc>
+                <a:spcPct val="150000"/>
+              </a:lnSpc>
+              <a:buNone/>
+            </a:pPr>
+            <a:r>
+              <a:rPr kumimoji="0" lang="en-US" altLang="en-US" sz="1300" b="0" i="0" u="none" strike="noStrike" cap="none" normalizeH="0" baseline="0">
+                <a:ln>
+                  <a:noFill/>
+                </a:ln>
+                <a:solidFill>
+                  <a:schemeClr val="tx1"/>
+                </a:solidFill>
+                <a:effectLst/>
+                <a:latin typeface="Arial" panose="020B0604020202020204" pitchFamily="34" charset="0"/>
+              </a:rPr>
+              <a:t>Məsələn:</a:t>
+            </a:r>
+            <a:r>
+              <a:rPr kumimoji="0" lang="az-Latn-AZ" altLang="en-US" sz="1300" b="0" i="0" u="none" strike="noStrike" cap="none" normalizeH="0" baseline="0">
+                <a:ln>
+                  <a:noFill/>
+                </a:ln>
+                <a:solidFill>
+                  <a:schemeClr val="tx1"/>
+                </a:solidFill>
+                <a:effectLst/>
+                <a:latin typeface="Arial" panose="020B0604020202020204" pitchFamily="34" charset="0"/>
+              </a:rPr>
+              <a:t> URL -də aşağıdakı kimi yazsaq onda nəticə bu cür olacaq.</a:t>
+            </a:r>
+          </a:p>
+          <a:p>
+            <a:pPr>
+              <a:lnSpc>
+                <a:spcPct val="150000"/>
+              </a:lnSpc>
+              <a:buNone/>
+            </a:pPr>
+            <a:endParaRPr lang="az-Latn-AZ" altLang="en-US" sz="1300">
+              <a:latin typeface="Arial" panose="020B0604020202020204" pitchFamily="34" charset="0"/>
+            </a:endParaRPr>
+          </a:p>
+          <a:p>
+            <a:pPr>
+              <a:lnSpc>
+                <a:spcPct val="150000"/>
+              </a:lnSpc>
+              <a:buNone/>
+            </a:pPr>
+            <a:endParaRPr kumimoji="0" lang="az-Latn-AZ" altLang="en-US" sz="1300" b="0" i="0" u="none" strike="noStrike" cap="none" normalizeH="0" baseline="0">
+              <a:ln>
+                <a:noFill/>
+              </a:ln>
+              <a:solidFill>
+                <a:schemeClr val="tx1"/>
+              </a:solidFill>
+              <a:effectLst/>
+              <a:latin typeface="Arial" panose="020B0604020202020204" pitchFamily="34" charset="0"/>
+            </a:endParaRPr>
+          </a:p>
+          <a:p>
+            <a:pPr>
+              <a:lnSpc>
+                <a:spcPct val="150000"/>
+              </a:lnSpc>
+              <a:buNone/>
+            </a:pPr>
+            <a:endParaRPr lang="az-Latn-AZ" altLang="en-US" sz="1300">
+              <a:latin typeface="Arial" panose="020B0604020202020204" pitchFamily="34" charset="0"/>
+            </a:endParaRPr>
+          </a:p>
+          <a:p>
+            <a:pPr>
+              <a:lnSpc>
+                <a:spcPct val="150000"/>
+              </a:lnSpc>
+              <a:buNone/>
+            </a:pPr>
+            <a:endParaRPr kumimoji="0" lang="az-Latn-AZ" altLang="en-US" sz="1300" b="0" i="0" u="none" strike="noStrike" cap="none" normalizeH="0" baseline="0">
+              <a:ln>
+                <a:noFill/>
+              </a:ln>
+              <a:solidFill>
+                <a:schemeClr val="tx1"/>
+              </a:solidFill>
+              <a:effectLst/>
+              <a:latin typeface="Arial" panose="020B0604020202020204" pitchFamily="34" charset="0"/>
+            </a:endParaRPr>
+          </a:p>
+          <a:p>
+            <a:pPr>
+              <a:lnSpc>
+                <a:spcPct val="150000"/>
+              </a:lnSpc>
+              <a:buNone/>
+            </a:pPr>
+            <a:endParaRPr kumimoji="0" lang="az-Latn-AZ" altLang="en-US" sz="1300" b="0" i="0" u="none" strike="noStrike" cap="none" normalizeH="0" baseline="0">
+              <a:ln>
+                <a:noFill/>
+              </a:ln>
+              <a:solidFill>
+                <a:schemeClr val="tx1"/>
+              </a:solidFill>
+              <a:effectLst/>
+              <a:latin typeface="Arial" panose="020B0604020202020204" pitchFamily="34" charset="0"/>
+            </a:endParaRPr>
+          </a:p>
+          <a:p>
+            <a:pPr>
+              <a:lnSpc>
+                <a:spcPct val="150000"/>
+              </a:lnSpc>
+              <a:buNone/>
+            </a:pPr>
+            <a:r>
+              <a:rPr kumimoji="0" lang="en-US" altLang="en-US" sz="1300" b="0" i="0" u="none" strike="noStrike" cap="none" normalizeH="0" baseline="0">
+                <a:ln>
+                  <a:noFill/>
+                </a:ln>
+                <a:solidFill>
+                  <a:schemeClr val="tx1"/>
+                </a:solidFill>
+                <a:effectLst/>
+                <a:latin typeface="Arial" panose="020B0604020202020204" pitchFamily="34" charset="0"/>
+              </a:rPr>
+              <a:t>Çünki </a:t>
+            </a:r>
+            <a:r>
+              <a:rPr kumimoji="0" lang="en-US" altLang="en-US" sz="1300" b="1" i="0" u="none" strike="noStrike" cap="none" normalizeH="0" baseline="0">
+                <a:ln>
+                  <a:noFill/>
+                </a:ln>
+                <a:solidFill>
+                  <a:srgbClr val="FF0000"/>
+                </a:solidFill>
+                <a:effectLst/>
+                <a:latin typeface="Arial" panose="020B0604020202020204" pitchFamily="34" charset="0"/>
+              </a:rPr>
+              <a:t>AuthCheck</a:t>
+            </a:r>
+            <a:r>
+              <a:rPr kumimoji="0" lang="en-US" altLang="en-US" sz="1300" b="0" i="0" u="none" strike="noStrike" cap="none" normalizeH="0" baseline="0">
+                <a:ln>
+                  <a:noFill/>
+                </a:ln>
+                <a:solidFill>
+                  <a:schemeClr val="tx1"/>
+                </a:solidFill>
+                <a:effectLst/>
+                <a:latin typeface="Arial" panose="020B0604020202020204" pitchFamily="34" charset="0"/>
+              </a:rPr>
+              <a:t> middleware </a:t>
+            </a:r>
+            <a:r>
+              <a:rPr kumimoji="0" lang="az-Latn-AZ" altLang="en-US" sz="1300" b="0" i="0" u="none" strike="noStrike" cap="none" normalizeH="0" baseline="0">
+                <a:ln>
+                  <a:noFill/>
+                </a:ln>
+                <a:solidFill>
+                  <a:schemeClr val="tx1"/>
+                </a:solidFill>
+                <a:effectLst/>
+                <a:latin typeface="Arial" panose="020B0604020202020204" pitchFamily="34" charset="0"/>
+              </a:rPr>
+              <a:t>bizə</a:t>
+            </a:r>
+            <a:r>
+              <a:rPr kumimoji="0" lang="en-US" altLang="en-US" sz="1300" b="0" i="0" u="none" strike="noStrike" cap="none" normalizeH="0" baseline="0">
+                <a:ln>
+                  <a:noFill/>
+                </a:ln>
+                <a:solidFill>
+                  <a:schemeClr val="tx1"/>
+                </a:solidFill>
+                <a:effectLst/>
+                <a:latin typeface="Arial" panose="020B0604020202020204" pitchFamily="34" charset="0"/>
+              </a:rPr>
+              <a:t> bunu təmin edir:</a:t>
+            </a:r>
+          </a:p>
+        </p:txBody>
+      </p:sp>
+      <p:pic>
+        <p:nvPicPr>
+          <p:cNvPr id="4" name="Picture 3">
+            <a:extLst>
+              <a:ext uri="{FF2B5EF4-FFF2-40B4-BE49-F238E27FC236}">
+                <a16:creationId xmlns:a16="http://schemas.microsoft.com/office/drawing/2014/main" id="{7B91BFFB-81CD-906D-FFE9-CDA00C8C8C21}"/>
+              </a:ext>
+            </a:extLst>
+          </p:cNvPr>
+          <p:cNvPicPr>
+            <a:picLocks noChangeAspect="1"/>
+          </p:cNvPicPr>
+          <p:nvPr/>
+        </p:nvPicPr>
+        <p:blipFill>
+          <a:blip r:embed="rId2"/>
+          <a:stretch>
+            <a:fillRect/>
+          </a:stretch>
+        </p:blipFill>
+        <p:spPr>
+          <a:xfrm>
+            <a:off x="0" y="1342094"/>
+            <a:ext cx="7068536" cy="685896"/>
+          </a:xfrm>
+          <a:prstGeom prst="rect">
+            <a:avLst/>
+          </a:prstGeom>
+        </p:spPr>
+      </p:pic>
+      <p:pic>
+        <p:nvPicPr>
+          <p:cNvPr id="6" name="Picture 5">
+            <a:extLst>
+              <a:ext uri="{FF2B5EF4-FFF2-40B4-BE49-F238E27FC236}">
+                <a16:creationId xmlns:a16="http://schemas.microsoft.com/office/drawing/2014/main" id="{C99A2159-0C19-92AD-CF89-249AAC1EDEC1}"/>
+              </a:ext>
+            </a:extLst>
+          </p:cNvPr>
+          <p:cNvPicPr>
+            <a:picLocks noChangeAspect="1"/>
+          </p:cNvPicPr>
+          <p:nvPr/>
+        </p:nvPicPr>
+        <p:blipFill>
+          <a:blip r:embed="rId3"/>
+          <a:stretch>
+            <a:fillRect/>
+          </a:stretch>
+        </p:blipFill>
+        <p:spPr>
+          <a:xfrm>
+            <a:off x="0" y="3115038"/>
+            <a:ext cx="4410691" cy="1219370"/>
+          </a:xfrm>
+          <a:prstGeom prst="rect">
+            <a:avLst/>
+          </a:prstGeom>
+        </p:spPr>
+      </p:pic>
+    </p:spTree>
+    <p:extLst>
+      <p:ext uri="{BB962C8B-B14F-4D97-AF65-F5344CB8AC3E}">
+        <p14:creationId xmlns:p14="http://schemas.microsoft.com/office/powerpoint/2010/main" val="1624798652"/>
+      </p:ext>
+    </p:extLst>
+  </p:cSld>
+  <p:clrMapOvr>
+    <a:masterClrMapping/>
+  </p:clrMapOvr>
+</p:sld>
+</file>
+
+<file path=ppt/slides/slide5.xml><?xml version="1.0" encoding="utf-8"?>
+<p:sld xmlns:a="http://schemas.openxmlformats.org/drawingml/2006/main" xmlns:r="http://schemas.openxmlformats.org/officeDocument/2006/relationships" xmlns:p="http://schemas.openxmlformats.org/presentationml/2006/main">
+  <p:cSld>
+    <p:spTree>
+      <p:nvGrpSpPr>
+        <p:cNvPr id="1" name="">
+          <a:extLst>
+            <a:ext uri="{FF2B5EF4-FFF2-40B4-BE49-F238E27FC236}">
+              <a16:creationId xmlns:a16="http://schemas.microsoft.com/office/drawing/2014/main" id="{F5CFD824-4460-FC45-0A54-E99AF3556E64}"/>
+            </a:ext>
+          </a:extLst>
+        </p:cNvPr>
+        <p:cNvGrpSpPr/>
+        <p:nvPr/>
+      </p:nvGrpSpPr>
+      <p:grpSpPr>
+        <a:xfrm>
+          <a:off x="0" y="0"/>
+          <a:ext cx="0" cy="0"/>
+          <a:chOff x="0" y="0"/>
+          <a:chExt cx="0" cy="0"/>
+        </a:xfrm>
+      </p:grpSpPr>
+      <p:sp>
+        <p:nvSpPr>
+          <p:cNvPr id="3" name="TextBox 2">
+            <a:extLst>
+              <a:ext uri="{FF2B5EF4-FFF2-40B4-BE49-F238E27FC236}">
+                <a16:creationId xmlns:a16="http://schemas.microsoft.com/office/drawing/2014/main" id="{8FB33499-A9B1-B50D-97A0-F430E5B7CC7B}"/>
+              </a:ext>
+            </a:extLst>
+          </p:cNvPr>
+          <p:cNvSpPr txBox="1"/>
+          <p:nvPr/>
+        </p:nvSpPr>
+        <p:spPr>
+          <a:xfrm>
+            <a:off x="217714" y="255046"/>
+            <a:ext cx="11756571" cy="355354"/>
+          </a:xfrm>
+          <a:prstGeom prst="rect">
+            <a:avLst/>
+          </a:prstGeom>
+          <a:noFill/>
+        </p:spPr>
+        <p:txBody>
+          <a:bodyPr wrap="square">
+            <a:spAutoFit/>
+          </a:bodyPr>
+          <a:lstStyle/>
+          <a:p>
+            <a:pPr>
+              <a:lnSpc>
+                <a:spcPct val="150000"/>
+              </a:lnSpc>
+              <a:buNone/>
+            </a:pPr>
+            <a:r>
+              <a:rPr kumimoji="0" lang="en-US" altLang="en-US" sz="1300" b="0" i="0" u="none" strike="noStrike" cap="none" normalizeH="0" baseline="0">
+                <a:ln>
+                  <a:noFill/>
+                </a:ln>
+                <a:solidFill>
+                  <a:schemeClr val="tx1"/>
+                </a:solidFill>
+                <a:effectLst/>
+                <a:latin typeface="Arial" panose="020B0604020202020204" pitchFamily="34" charset="0"/>
+              </a:rPr>
+              <a:t>.</a:t>
+            </a:r>
+          </a:p>
+        </p:txBody>
+      </p:sp>
+    </p:spTree>
+    <p:extLst>
+      <p:ext uri="{BB962C8B-B14F-4D97-AF65-F5344CB8AC3E}">
+        <p14:creationId xmlns:p14="http://schemas.microsoft.com/office/powerpoint/2010/main" val="1221168735"/>
+      </p:ext>
+    </p:extLst>
+  </p:cSld>
+  <p:clrMapOvr>
+    <a:masterClrMapping/>
+  </p:clrMapOvr>
+</p:sld>
+</file>
+
+<file path=ppt/slides/slide6.xml><?xml version="1.0" encoding="utf-8"?>
 <p:sld xmlns:a="http://schemas.openxmlformats.org/drawingml/2006/main" xmlns:r="http://schemas.openxmlformats.org/officeDocument/2006/relationships" xmlns:p="http://schemas.openxmlformats.org/presentationml/2006/main">
   <p:cSld>
     <p:spTree>
